--- a/EEG_Stress_Detection_Presentation.pptx
+++ b/EEG_Stress_Detection_Presentation.pptx
@@ -1957,6 +1957,13 @@
             <a:prstDash val="solid"/>
           </a:ln>
         </p:spPr>
+        <p:txBody>
+          <a:bodyPr/>
+          <a:lstStyle/>
+          <a:p>
+            <a:endParaRPr lang="en-GB"/>
+          </a:p>
+        </p:txBody>
       </p:sp>
       <p:sp>
         <p:nvSpPr>
@@ -2075,6 +2082,13 @@
             <a:prstDash val="solid"/>
           </a:ln>
         </p:spPr>
+        <p:txBody>
+          <a:bodyPr/>
+          <a:lstStyle/>
+          <a:p>
+            <a:endParaRPr lang="en-GB"/>
+          </a:p>
+        </p:txBody>
       </p:sp>
       <p:sp>
         <p:nvSpPr>
@@ -2337,6 +2351,13 @@
             </a:outerShdw>
           </a:effectLst>
         </p:spPr>
+        <p:txBody>
+          <a:bodyPr/>
+          <a:lstStyle/>
+          <a:p>
+            <a:endParaRPr lang="en-GB"/>
+          </a:p>
+        </p:txBody>
       </p:sp>
       <p:sp>
         <p:nvSpPr>
@@ -2483,6 +2504,13 @@
             </a:outerShdw>
           </a:effectLst>
         </p:spPr>
+        <p:txBody>
+          <a:bodyPr/>
+          <a:lstStyle/>
+          <a:p>
+            <a:endParaRPr lang="en-GB"/>
+          </a:p>
+        </p:txBody>
       </p:sp>
       <p:sp>
         <p:nvSpPr>
@@ -2629,6 +2657,13 @@
             </a:outerShdw>
           </a:effectLst>
         </p:spPr>
+        <p:txBody>
+          <a:bodyPr/>
+          <a:lstStyle/>
+          <a:p>
+            <a:endParaRPr lang="en-GB"/>
+          </a:p>
+        </p:txBody>
       </p:sp>
       <p:sp>
         <p:nvSpPr>
@@ -4580,6 +4615,13 @@
             </a:outerShdw>
           </a:effectLst>
         </p:spPr>
+        <p:txBody>
+          <a:bodyPr/>
+          <a:lstStyle/>
+          <a:p>
+            <a:endParaRPr lang="en-GB"/>
+          </a:p>
+        </p:txBody>
       </p:sp>
       <p:sp>
         <p:nvSpPr>
@@ -4817,6 +4859,13 @@
             </a:outerShdw>
           </a:effectLst>
         </p:spPr>
+        <p:txBody>
+          <a:bodyPr/>
+          <a:lstStyle/>
+          <a:p>
+            <a:endParaRPr lang="en-GB"/>
+          </a:p>
+        </p:txBody>
       </p:sp>
       <p:sp>
         <p:nvSpPr>
@@ -4878,6 +4927,13 @@
           </a:solidFill>
           <a:ln/>
         </p:spPr>
+        <p:txBody>
+          <a:bodyPr/>
+          <a:lstStyle/>
+          <a:p>
+            <a:endParaRPr lang="en-GB"/>
+          </a:p>
+        </p:txBody>
       </p:sp>
       <p:sp>
         <p:nvSpPr>
@@ -5056,6 +5112,13 @@
           </a:solidFill>
           <a:ln/>
         </p:spPr>
+        <p:txBody>
+          <a:bodyPr/>
+          <a:lstStyle/>
+          <a:p>
+            <a:endParaRPr lang="en-GB"/>
+          </a:p>
+        </p:txBody>
       </p:sp>
       <p:sp>
         <p:nvSpPr>
@@ -5234,6 +5297,13 @@
           </a:solidFill>
           <a:ln/>
         </p:spPr>
+        <p:txBody>
+          <a:bodyPr/>
+          <a:lstStyle/>
+          <a:p>
+            <a:endParaRPr lang="en-GB"/>
+          </a:p>
+        </p:txBody>
       </p:sp>
       <p:sp>
         <p:nvSpPr>
@@ -5412,6 +5482,13 @@
           </a:solidFill>
           <a:ln/>
         </p:spPr>
+        <p:txBody>
+          <a:bodyPr/>
+          <a:lstStyle/>
+          <a:p>
+            <a:endParaRPr lang="en-GB"/>
+          </a:p>
+        </p:txBody>
       </p:sp>
       <p:sp>
         <p:nvSpPr>
@@ -5636,6 +5713,13 @@
             </a:outerShdw>
           </a:effectLst>
         </p:spPr>
+        <p:txBody>
+          <a:bodyPr/>
+          <a:lstStyle/>
+          <a:p>
+            <a:endParaRPr lang="en-GB"/>
+          </a:p>
+        </p:txBody>
       </p:sp>
       <p:sp>
         <p:nvSpPr>
@@ -5839,6 +5923,13 @@
             </a:outerShdw>
           </a:effectLst>
         </p:spPr>
+        <p:txBody>
+          <a:bodyPr/>
+          <a:lstStyle/>
+          <a:p>
+            <a:endParaRPr lang="en-GB"/>
+          </a:p>
+        </p:txBody>
       </p:sp>
       <p:sp>
         <p:nvSpPr>
@@ -5907,6 +5998,13 @@
             </a:outerShdw>
           </a:effectLst>
         </p:spPr>
+        <p:txBody>
+          <a:bodyPr/>
+          <a:lstStyle/>
+          <a:p>
+            <a:endParaRPr lang="en-GB"/>
+          </a:p>
+        </p:txBody>
       </p:sp>
       <p:sp>
         <p:nvSpPr>
@@ -5975,6 +6073,13 @@
             </a:outerShdw>
           </a:effectLst>
         </p:spPr>
+        <p:txBody>
+          <a:bodyPr/>
+          <a:lstStyle/>
+          <a:p>
+            <a:endParaRPr lang="en-GB"/>
+          </a:p>
+        </p:txBody>
       </p:sp>
       <p:sp>
         <p:nvSpPr>
@@ -6043,6 +6148,13 @@
             </a:outerShdw>
           </a:effectLst>
         </p:spPr>
+        <p:txBody>
+          <a:bodyPr/>
+          <a:lstStyle/>
+          <a:p>
+            <a:endParaRPr lang="en-GB"/>
+          </a:p>
+        </p:txBody>
       </p:sp>
       <p:sp>
         <p:nvSpPr>
@@ -6183,6 +6295,13 @@
             </a:outerShdw>
           </a:effectLst>
         </p:spPr>
+        <p:txBody>
+          <a:bodyPr/>
+          <a:lstStyle/>
+          <a:p>
+            <a:endParaRPr lang="en-GB"/>
+          </a:p>
+        </p:txBody>
       </p:sp>
       <p:sp>
         <p:nvSpPr>
@@ -6208,6 +6327,13 @@
             <a:prstDash val="solid"/>
           </a:ln>
         </p:spPr>
+        <p:txBody>
+          <a:bodyPr/>
+          <a:lstStyle/>
+          <a:p>
+            <a:endParaRPr lang="en-GB"/>
+          </a:p>
+        </p:txBody>
       </p:sp>
       <p:sp>
         <p:nvSpPr>
@@ -6315,6 +6441,13 @@
             </a:outerShdw>
           </a:effectLst>
         </p:spPr>
+        <p:txBody>
+          <a:bodyPr/>
+          <a:lstStyle/>
+          <a:p>
+            <a:endParaRPr lang="en-GB"/>
+          </a:p>
+        </p:txBody>
       </p:sp>
       <p:sp>
         <p:nvSpPr>
@@ -6340,6 +6473,13 @@
             <a:prstDash val="solid"/>
           </a:ln>
         </p:spPr>
+        <p:txBody>
+          <a:bodyPr/>
+          <a:lstStyle/>
+          <a:p>
+            <a:endParaRPr lang="en-GB"/>
+          </a:p>
+        </p:txBody>
       </p:sp>
       <p:sp>
         <p:nvSpPr>
@@ -6447,6 +6587,13 @@
             </a:outerShdw>
           </a:effectLst>
         </p:spPr>
+        <p:txBody>
+          <a:bodyPr/>
+          <a:lstStyle/>
+          <a:p>
+            <a:endParaRPr lang="en-GB"/>
+          </a:p>
+        </p:txBody>
       </p:sp>
       <p:sp>
         <p:nvSpPr>
@@ -6472,6 +6619,13 @@
             <a:prstDash val="solid"/>
           </a:ln>
         </p:spPr>
+        <p:txBody>
+          <a:bodyPr/>
+          <a:lstStyle/>
+          <a:p>
+            <a:endParaRPr lang="en-GB"/>
+          </a:p>
+        </p:txBody>
       </p:sp>
       <p:sp>
         <p:nvSpPr>
@@ -6579,6 +6733,13 @@
             </a:outerShdw>
           </a:effectLst>
         </p:spPr>
+        <p:txBody>
+          <a:bodyPr/>
+          <a:lstStyle/>
+          <a:p>
+            <a:endParaRPr lang="en-GB"/>
+          </a:p>
+        </p:txBody>
       </p:sp>
       <p:sp>
         <p:nvSpPr>
@@ -6604,6 +6765,13 @@
             <a:prstDash val="solid"/>
           </a:ln>
         </p:spPr>
+        <p:txBody>
+          <a:bodyPr/>
+          <a:lstStyle/>
+          <a:p>
+            <a:endParaRPr lang="en-GB"/>
+          </a:p>
+        </p:txBody>
       </p:sp>
       <p:sp>
         <p:nvSpPr>
@@ -6822,6 +6990,13 @@
             </a:outerShdw>
           </a:effectLst>
         </p:spPr>
+        <p:txBody>
+          <a:bodyPr/>
+          <a:lstStyle/>
+          <a:p>
+            <a:endParaRPr lang="en-GB"/>
+          </a:p>
+        </p:txBody>
       </p:sp>
       <p:sp>
         <p:nvSpPr>
@@ -6890,6 +7065,13 @@
             </a:outerShdw>
           </a:effectLst>
         </p:spPr>
+        <p:txBody>
+          <a:bodyPr/>
+          <a:lstStyle/>
+          <a:p>
+            <a:endParaRPr lang="en-GB"/>
+          </a:p>
+        </p:txBody>
       </p:sp>
       <p:sp>
         <p:nvSpPr>
@@ -6958,6 +7140,13 @@
             </a:outerShdw>
           </a:effectLst>
         </p:spPr>
+        <p:txBody>
+          <a:bodyPr/>
+          <a:lstStyle/>
+          <a:p>
+            <a:endParaRPr lang="en-GB"/>
+          </a:p>
+        </p:txBody>
       </p:sp>
       <p:sp>
         <p:nvSpPr>
@@ -7026,6 +7215,13 @@
             </a:outerShdw>
           </a:effectLst>
         </p:spPr>
+        <p:txBody>
+          <a:bodyPr/>
+          <a:lstStyle/>
+          <a:p>
+            <a:endParaRPr lang="en-GB"/>
+          </a:p>
+        </p:txBody>
       </p:sp>
       <p:sp>
         <p:nvSpPr>
@@ -7094,6 +7290,13 @@
             </a:outerShdw>
           </a:effectLst>
         </p:spPr>
+        <p:txBody>
+          <a:bodyPr/>
+          <a:lstStyle/>
+          <a:p>
+            <a:endParaRPr lang="en-GB"/>
+          </a:p>
+        </p:txBody>
       </p:sp>
       <p:sp>
         <p:nvSpPr>
@@ -7201,6 +7404,13 @@
             </a:outerShdw>
           </a:effectLst>
         </p:spPr>
+        <p:txBody>
+          <a:bodyPr/>
+          <a:lstStyle/>
+          <a:p>
+            <a:endParaRPr lang="en-GB"/>
+          </a:p>
+        </p:txBody>
       </p:sp>
       <p:sp>
         <p:nvSpPr>
@@ -7269,6 +7479,13 @@
             </a:outerShdw>
           </a:effectLst>
         </p:spPr>
+        <p:txBody>
+          <a:bodyPr/>
+          <a:lstStyle/>
+          <a:p>
+            <a:endParaRPr lang="en-GB"/>
+          </a:p>
+        </p:txBody>
       </p:sp>
       <p:sp>
         <p:nvSpPr>
@@ -7337,6 +7554,13 @@
             </a:outerShdw>
           </a:effectLst>
         </p:spPr>
+        <p:txBody>
+          <a:bodyPr/>
+          <a:lstStyle/>
+          <a:p>
+            <a:endParaRPr lang="en-GB"/>
+          </a:p>
+        </p:txBody>
       </p:sp>
       <p:sp>
         <p:nvSpPr>
@@ -7405,6 +7629,13 @@
             </a:outerShdw>
           </a:effectLst>
         </p:spPr>
+        <p:txBody>
+          <a:bodyPr/>
+          <a:lstStyle/>
+          <a:p>
+            <a:endParaRPr lang="en-GB"/>
+          </a:p>
+        </p:txBody>
       </p:sp>
       <p:sp>
         <p:nvSpPr>
@@ -7473,6 +7704,13 @@
             </a:outerShdw>
           </a:effectLst>
         </p:spPr>
+        <p:txBody>
+          <a:bodyPr/>
+          <a:lstStyle/>
+          <a:p>
+            <a:endParaRPr lang="en-GB"/>
+          </a:p>
+        </p:txBody>
       </p:sp>
       <p:sp>
         <p:nvSpPr>
@@ -7570,6 +7808,13 @@
             <a:prstDash val="solid"/>
           </a:ln>
         </p:spPr>
+        <p:txBody>
+          <a:bodyPr/>
+          <a:lstStyle/>
+          <a:p>
+            <a:endParaRPr lang="en-GB"/>
+          </a:p>
+        </p:txBody>
       </p:sp>
       <p:sp>
         <p:nvSpPr>
@@ -7632,6 +7877,13 @@
             <a:prstDash val="solid"/>
           </a:ln>
         </p:spPr>
+        <p:txBody>
+          <a:bodyPr/>
+          <a:lstStyle/>
+          <a:p>
+            <a:endParaRPr lang="en-GB"/>
+          </a:p>
+        </p:txBody>
       </p:sp>
       <p:sp>
         <p:nvSpPr>
@@ -7654,6 +7906,13 @@
           </a:solidFill>
           <a:ln/>
         </p:spPr>
+        <p:txBody>
+          <a:bodyPr/>
+          <a:lstStyle/>
+          <a:p>
+            <a:endParaRPr lang="en-GB"/>
+          </a:p>
+        </p:txBody>
       </p:sp>
       <p:sp>
         <p:nvSpPr>
@@ -7679,6 +7938,13 @@
             <a:prstDash val="solid"/>
           </a:ln>
         </p:spPr>
+        <p:txBody>
+          <a:bodyPr/>
+          <a:lstStyle/>
+          <a:p>
+            <a:endParaRPr lang="en-GB"/>
+          </a:p>
+        </p:txBody>
       </p:sp>
       <p:sp>
         <p:nvSpPr>
@@ -7779,6 +8045,13 @@
           </a:solidFill>
           <a:ln/>
         </p:spPr>
+        <p:txBody>
+          <a:bodyPr/>
+          <a:lstStyle/>
+          <a:p>
+            <a:endParaRPr lang="en-GB"/>
+          </a:p>
+        </p:txBody>
       </p:sp>
       <p:sp>
         <p:nvSpPr>
@@ -7804,6 +8077,13 @@
             <a:prstDash val="solid"/>
           </a:ln>
         </p:spPr>
+        <p:txBody>
+          <a:bodyPr/>
+          <a:lstStyle/>
+          <a:p>
+            <a:endParaRPr lang="en-GB"/>
+          </a:p>
+        </p:txBody>
       </p:sp>
       <p:sp>
         <p:nvSpPr>
@@ -7904,6 +8184,13 @@
           </a:solidFill>
           <a:ln/>
         </p:spPr>
+        <p:txBody>
+          <a:bodyPr/>
+          <a:lstStyle/>
+          <a:p>
+            <a:endParaRPr lang="en-GB"/>
+          </a:p>
+        </p:txBody>
       </p:sp>
       <p:sp>
         <p:nvSpPr>
@@ -7929,6 +8216,13 @@
             <a:prstDash val="solid"/>
           </a:ln>
         </p:spPr>
+        <p:txBody>
+          <a:bodyPr/>
+          <a:lstStyle/>
+          <a:p>
+            <a:endParaRPr lang="en-GB"/>
+          </a:p>
+        </p:txBody>
       </p:sp>
       <p:sp>
         <p:nvSpPr>
@@ -8029,6 +8323,13 @@
           </a:solidFill>
           <a:ln/>
         </p:spPr>
+        <p:txBody>
+          <a:bodyPr/>
+          <a:lstStyle/>
+          <a:p>
+            <a:endParaRPr lang="en-GB"/>
+          </a:p>
+        </p:txBody>
       </p:sp>
       <p:sp>
         <p:nvSpPr>
@@ -8054,6 +8355,13 @@
             <a:prstDash val="solid"/>
           </a:ln>
         </p:spPr>
+        <p:txBody>
+          <a:bodyPr/>
+          <a:lstStyle/>
+          <a:p>
+            <a:endParaRPr lang="en-GB"/>
+          </a:p>
+        </p:txBody>
       </p:sp>
       <p:sp>
         <p:nvSpPr>
@@ -8130,45 +8438,6 @@
               <a:t>Gamma-band and alpha/beta frequency features are the most predictive — consistent with the EEG stress detection literature.</a:t>
             </a:r>
             <a:endParaRPr lang="en-US" sz="1250" dirty="0"/>
-          </a:p>
-        </p:txBody>
-      </p:sp>
-      <p:sp>
-        <p:nvSpPr>
-          <p:cNvPr id="21" name="Text 19"/>
-          <p:cNvSpPr/>
-          <p:nvPr/>
-        </p:nvSpPr>
-        <p:spPr>
-          <a:xfrm>
-            <a:off x="457200" y="4681728"/>
-            <a:ext cx="8229600" cy="347472"/>
-          </a:xfrm>
-          <a:prstGeom prst="rect">
-            <a:avLst/>
-          </a:prstGeom>
-          <a:noFill/>
-          <a:ln/>
-        </p:spPr>
-        <p:txBody>
-          <a:bodyPr wrap="square" rtlCol="0" anchor="ctr"/>
-          <a:lstStyle/>
-          <a:p>
-            <a:pPr marL="0" indent="0" algn="ctr">
-              <a:buNone/>
-            </a:pPr>
-            <a:r>
-              <a:rPr lang="en-US" sz="1800" b="1" dirty="0">
-                <a:solidFill>
-                  <a:srgbClr val="0096C7"/>
-                </a:solidFill>
-                <a:latin typeface="Calibri" pitchFamily="34" charset="0"/>
-                <a:ea typeface="Calibri" pitchFamily="34" charset="-122"/>
-                <a:cs typeface="Calibri" pitchFamily="34" charset="-120"/>
-              </a:rPr>
-              <a:t>Thank you  —  Questions?</a:t>
-            </a:r>
-            <a:endParaRPr lang="en-US" sz="1800" dirty="0"/>
           </a:p>
         </p:txBody>
       </p:sp>
@@ -8483,6 +8752,13 @@
             </a:outerShdw>
           </a:effectLst>
         </p:spPr>
+        <p:txBody>
+          <a:bodyPr/>
+          <a:lstStyle/>
+          <a:p>
+            <a:endParaRPr lang="en-GB"/>
+          </a:p>
+        </p:txBody>
       </p:sp>
       <p:sp>
         <p:nvSpPr>
@@ -8590,6 +8866,13 @@
             </a:outerShdw>
           </a:effectLst>
         </p:spPr>
+        <p:txBody>
+          <a:bodyPr/>
+          <a:lstStyle/>
+          <a:p>
+            <a:endParaRPr lang="en-GB"/>
+          </a:p>
+        </p:txBody>
       </p:sp>
       <p:sp>
         <p:nvSpPr>
@@ -8697,6 +8980,13 @@
             </a:outerShdw>
           </a:effectLst>
         </p:spPr>
+        <p:txBody>
+          <a:bodyPr/>
+          <a:lstStyle/>
+          <a:p>
+            <a:endParaRPr lang="en-GB"/>
+          </a:p>
+        </p:txBody>
       </p:sp>
       <p:sp>
         <p:nvSpPr>
@@ -8876,6 +9166,13 @@
             </a:outerShdw>
           </a:effectLst>
         </p:spPr>
+        <p:txBody>
+          <a:bodyPr/>
+          <a:lstStyle/>
+          <a:p>
+            <a:endParaRPr lang="en-GB"/>
+          </a:p>
+        </p:txBody>
       </p:sp>
       <p:sp>
         <p:nvSpPr>
@@ -9127,6 +9424,13 @@
           </a:solidFill>
           <a:ln/>
         </p:spPr>
+        <p:txBody>
+          <a:bodyPr/>
+          <a:lstStyle/>
+          <a:p>
+            <a:endParaRPr lang="en-GB"/>
+          </a:p>
+        </p:txBody>
       </p:sp>
       <p:sp>
         <p:nvSpPr>
@@ -9189,6 +9493,13 @@
             <a:prstDash val="solid"/>
           </a:ln>
         </p:spPr>
+        <p:txBody>
+          <a:bodyPr/>
+          <a:lstStyle/>
+          <a:p>
+            <a:endParaRPr lang="en-GB"/>
+          </a:p>
+        </p:txBody>
       </p:sp>
       <p:sp>
         <p:nvSpPr>
@@ -9211,6 +9522,13 @@
           </a:solidFill>
           <a:ln/>
         </p:spPr>
+        <p:txBody>
+          <a:bodyPr/>
+          <a:lstStyle/>
+          <a:p>
+            <a:endParaRPr lang="en-GB"/>
+          </a:p>
+        </p:txBody>
       </p:sp>
       <p:sp>
         <p:nvSpPr>
@@ -9290,6 +9608,13 @@
             <a:prstDash val="solid"/>
           </a:ln>
         </p:spPr>
+        <p:txBody>
+          <a:bodyPr/>
+          <a:lstStyle/>
+          <a:p>
+            <a:endParaRPr lang="en-GB"/>
+          </a:p>
+        </p:txBody>
       </p:sp>
       <p:sp>
         <p:nvSpPr>
@@ -9312,6 +9637,13 @@
           </a:solidFill>
           <a:ln/>
         </p:spPr>
+        <p:txBody>
+          <a:bodyPr/>
+          <a:lstStyle/>
+          <a:p>
+            <a:endParaRPr lang="en-GB"/>
+          </a:p>
+        </p:txBody>
       </p:sp>
       <p:sp>
         <p:nvSpPr>
@@ -9391,6 +9723,13 @@
             <a:prstDash val="solid"/>
           </a:ln>
         </p:spPr>
+        <p:txBody>
+          <a:bodyPr/>
+          <a:lstStyle/>
+          <a:p>
+            <a:endParaRPr lang="en-GB"/>
+          </a:p>
+        </p:txBody>
       </p:sp>
       <p:sp>
         <p:nvSpPr>
@@ -9413,6 +9752,13 @@
           </a:solidFill>
           <a:ln/>
         </p:spPr>
+        <p:txBody>
+          <a:bodyPr/>
+          <a:lstStyle/>
+          <a:p>
+            <a:endParaRPr lang="en-GB"/>
+          </a:p>
+        </p:txBody>
       </p:sp>
       <p:sp>
         <p:nvSpPr>
@@ -9492,6 +9838,13 @@
             <a:prstDash val="solid"/>
           </a:ln>
         </p:spPr>
+        <p:txBody>
+          <a:bodyPr/>
+          <a:lstStyle/>
+          <a:p>
+            <a:endParaRPr lang="en-GB"/>
+          </a:p>
+        </p:txBody>
       </p:sp>
       <p:sp>
         <p:nvSpPr>
@@ -9514,6 +9867,13 @@
           </a:solidFill>
           <a:ln/>
         </p:spPr>
+        <p:txBody>
+          <a:bodyPr/>
+          <a:lstStyle/>
+          <a:p>
+            <a:endParaRPr lang="en-GB"/>
+          </a:p>
+        </p:txBody>
       </p:sp>
       <p:sp>
         <p:nvSpPr>
@@ -9582,6 +9942,13 @@
             </a:outerShdw>
           </a:effectLst>
         </p:spPr>
+        <p:txBody>
+          <a:bodyPr/>
+          <a:lstStyle/>
+          <a:p>
+            <a:endParaRPr lang="en-GB"/>
+          </a:p>
+        </p:txBody>
       </p:sp>
       <p:sp>
         <p:nvSpPr>
@@ -9706,6 +10073,13 @@
             </a:outerShdw>
           </a:effectLst>
         </p:spPr>
+        <p:txBody>
+          <a:bodyPr/>
+          <a:lstStyle/>
+          <a:p>
+            <a:endParaRPr lang="en-GB"/>
+          </a:p>
+        </p:txBody>
       </p:sp>
       <p:sp>
         <p:nvSpPr>
@@ -9924,6 +10298,13 @@
             </a:outerShdw>
           </a:effectLst>
         </p:spPr>
+        <p:txBody>
+          <a:bodyPr/>
+          <a:lstStyle/>
+          <a:p>
+            <a:endParaRPr lang="en-GB"/>
+          </a:p>
+        </p:txBody>
       </p:sp>
       <p:sp>
         <p:nvSpPr>
@@ -9949,6 +10330,13 @@
             <a:prstDash val="solid"/>
           </a:ln>
         </p:spPr>
+        <p:txBody>
+          <a:bodyPr/>
+          <a:lstStyle/>
+          <a:p>
+            <a:endParaRPr lang="en-GB"/>
+          </a:p>
+        </p:txBody>
       </p:sp>
       <p:sp>
         <p:nvSpPr>
@@ -10056,6 +10444,13 @@
             </a:outerShdw>
           </a:effectLst>
         </p:spPr>
+        <p:txBody>
+          <a:bodyPr/>
+          <a:lstStyle/>
+          <a:p>
+            <a:endParaRPr lang="en-GB"/>
+          </a:p>
+        </p:txBody>
       </p:sp>
       <p:sp>
         <p:nvSpPr>
@@ -10081,6 +10476,13 @@
             <a:prstDash val="solid"/>
           </a:ln>
         </p:spPr>
+        <p:txBody>
+          <a:bodyPr/>
+          <a:lstStyle/>
+          <a:p>
+            <a:endParaRPr lang="en-GB"/>
+          </a:p>
+        </p:txBody>
       </p:sp>
       <p:sp>
         <p:nvSpPr>
@@ -10188,6 +10590,13 @@
             </a:outerShdw>
           </a:effectLst>
         </p:spPr>
+        <p:txBody>
+          <a:bodyPr/>
+          <a:lstStyle/>
+          <a:p>
+            <a:endParaRPr lang="en-GB"/>
+          </a:p>
+        </p:txBody>
       </p:sp>
       <p:sp>
         <p:nvSpPr>
@@ -10213,6 +10622,13 @@
             <a:prstDash val="solid"/>
           </a:ln>
         </p:spPr>
+        <p:txBody>
+          <a:bodyPr/>
+          <a:lstStyle/>
+          <a:p>
+            <a:endParaRPr lang="en-GB"/>
+          </a:p>
+        </p:txBody>
       </p:sp>
       <p:sp>
         <p:nvSpPr>
@@ -10320,6 +10736,13 @@
             </a:outerShdw>
           </a:effectLst>
         </p:spPr>
+        <p:txBody>
+          <a:bodyPr/>
+          <a:lstStyle/>
+          <a:p>
+            <a:endParaRPr lang="en-GB"/>
+          </a:p>
+        </p:txBody>
       </p:sp>
       <p:sp>
         <p:nvSpPr>
@@ -10345,6 +10768,13 @@
             <a:prstDash val="solid"/>
           </a:ln>
         </p:spPr>
+        <p:txBody>
+          <a:bodyPr/>
+          <a:lstStyle/>
+          <a:p>
+            <a:endParaRPr lang="en-GB"/>
+          </a:p>
+        </p:txBody>
       </p:sp>
       <p:sp>
         <p:nvSpPr>
@@ -10452,6 +10882,13 @@
             </a:outerShdw>
           </a:effectLst>
         </p:spPr>
+        <p:txBody>
+          <a:bodyPr/>
+          <a:lstStyle/>
+          <a:p>
+            <a:endParaRPr lang="en-GB"/>
+          </a:p>
+        </p:txBody>
       </p:sp>
       <p:sp>
         <p:nvSpPr>
@@ -10477,6 +10914,13 @@
             <a:prstDash val="solid"/>
           </a:ln>
         </p:spPr>
+        <p:txBody>
+          <a:bodyPr/>
+          <a:lstStyle/>
+          <a:p>
+            <a:endParaRPr lang="en-GB"/>
+          </a:p>
+        </p:txBody>
       </p:sp>
       <p:sp>
         <p:nvSpPr>
@@ -10584,6 +11028,13 @@
             </a:outerShdw>
           </a:effectLst>
         </p:spPr>
+        <p:txBody>
+          <a:bodyPr/>
+          <a:lstStyle/>
+          <a:p>
+            <a:endParaRPr lang="en-GB"/>
+          </a:p>
+        </p:txBody>
       </p:sp>
       <p:sp>
         <p:nvSpPr>
@@ -10609,6 +11060,13 @@
             <a:prstDash val="solid"/>
           </a:ln>
         </p:spPr>
+        <p:txBody>
+          <a:bodyPr/>
+          <a:lstStyle/>
+          <a:p>
+            <a:endParaRPr lang="en-GB"/>
+          </a:p>
+        </p:txBody>
       </p:sp>
       <p:sp>
         <p:nvSpPr>
@@ -10716,6 +11174,13 @@
             </a:outerShdw>
           </a:effectLst>
         </p:spPr>
+        <p:txBody>
+          <a:bodyPr/>
+          <a:lstStyle/>
+          <a:p>
+            <a:endParaRPr lang="en-GB"/>
+          </a:p>
+        </p:txBody>
       </p:sp>
       <p:sp>
         <p:nvSpPr>
@@ -10741,6 +11206,13 @@
             <a:prstDash val="solid"/>
           </a:ln>
         </p:spPr>
+        <p:txBody>
+          <a:bodyPr/>
+          <a:lstStyle/>
+          <a:p>
+            <a:endParaRPr lang="en-GB"/>
+          </a:p>
+        </p:txBody>
       </p:sp>
       <p:sp>
         <p:nvSpPr>
@@ -10944,6 +11416,13 @@
             </a:outerShdw>
           </a:effectLst>
         </p:spPr>
+        <p:txBody>
+          <a:bodyPr/>
+          <a:lstStyle/>
+          <a:p>
+            <a:endParaRPr lang="en-GB"/>
+          </a:p>
+        </p:txBody>
       </p:sp>
       <p:sp>
         <p:nvSpPr>
@@ -11051,6 +11530,13 @@
             </a:outerShdw>
           </a:effectLst>
         </p:spPr>
+        <p:txBody>
+          <a:bodyPr/>
+          <a:lstStyle/>
+          <a:p>
+            <a:endParaRPr lang="en-GB"/>
+          </a:p>
+        </p:txBody>
       </p:sp>
       <p:sp>
         <p:nvSpPr>
@@ -11158,6 +11644,13 @@
             </a:outerShdw>
           </a:effectLst>
         </p:spPr>
+        <p:txBody>
+          <a:bodyPr/>
+          <a:lstStyle/>
+          <a:p>
+            <a:endParaRPr lang="en-GB"/>
+          </a:p>
+        </p:txBody>
       </p:sp>
       <p:sp>
         <p:nvSpPr>
@@ -11265,6 +11758,13 @@
             </a:outerShdw>
           </a:effectLst>
         </p:spPr>
+        <p:txBody>
+          <a:bodyPr/>
+          <a:lstStyle/>
+          <a:p>
+            <a:endParaRPr lang="en-GB"/>
+          </a:p>
+        </p:txBody>
       </p:sp>
       <p:sp>
         <p:nvSpPr>
@@ -12714,6 +13214,13 @@
             </a:outerShdw>
           </a:effectLst>
         </p:spPr>
+        <p:txBody>
+          <a:bodyPr/>
+          <a:lstStyle/>
+          <a:p>
+            <a:endParaRPr lang="en-GB"/>
+          </a:p>
+        </p:txBody>
       </p:sp>
       <p:sp>
         <p:nvSpPr>
@@ -12821,6 +13328,13 @@
             </a:outerShdw>
           </a:effectLst>
         </p:spPr>
+        <p:txBody>
+          <a:bodyPr/>
+          <a:lstStyle/>
+          <a:p>
+            <a:endParaRPr lang="en-GB"/>
+          </a:p>
+        </p:txBody>
       </p:sp>
       <p:sp>
         <p:nvSpPr>
@@ -12928,6 +13442,13 @@
             </a:outerShdw>
           </a:effectLst>
         </p:spPr>
+        <p:txBody>
+          <a:bodyPr/>
+          <a:lstStyle/>
+          <a:p>
+            <a:endParaRPr lang="en-GB"/>
+          </a:p>
+        </p:txBody>
       </p:sp>
       <p:sp>
         <p:nvSpPr>
@@ -13035,6 +13556,13 @@
             </a:outerShdw>
           </a:effectLst>
         </p:spPr>
+        <p:txBody>
+          <a:bodyPr/>
+          <a:lstStyle/>
+          <a:p>
+            <a:endParaRPr lang="en-GB"/>
+          </a:p>
+        </p:txBody>
       </p:sp>
       <p:sp>
         <p:nvSpPr>
@@ -13241,8 +13769,8 @@
         </p:blipFill>
         <p:spPr>
           <a:xfrm>
-            <a:off x="365760" y="868680"/>
-            <a:ext cx="5029200" cy="2743200"/>
+            <a:off x="1461734" y="2765704"/>
+            <a:ext cx="3873790" cy="2112976"/>
           </a:xfrm>
           <a:prstGeom prst="rect">
             <a:avLst/>
@@ -13277,6 +13805,13 @@
             </a:outerShdw>
           </a:effectLst>
         </p:spPr>
+        <p:txBody>
+          <a:bodyPr/>
+          <a:lstStyle/>
+          <a:p>
+            <a:endParaRPr lang="en-GB"/>
+          </a:p>
+        </p:txBody>
       </p:sp>
       <p:sp>
         <p:nvSpPr>
@@ -13302,6 +13837,13 @@
             <a:prstDash val="solid"/>
           </a:ln>
         </p:spPr>
+        <p:txBody>
+          <a:bodyPr/>
+          <a:lstStyle/>
+          <a:p>
+            <a:endParaRPr lang="en-GB"/>
+          </a:p>
+        </p:txBody>
       </p:sp>
       <p:sp>
         <p:nvSpPr>
@@ -13465,6 +14007,13 @@
             </a:outerShdw>
           </a:effectLst>
         </p:spPr>
+        <p:txBody>
+          <a:bodyPr/>
+          <a:lstStyle/>
+          <a:p>
+            <a:endParaRPr lang="en-GB"/>
+          </a:p>
+        </p:txBody>
       </p:sp>
       <p:sp>
         <p:nvSpPr>
@@ -13490,6 +14039,13 @@
             <a:prstDash val="solid"/>
           </a:ln>
         </p:spPr>
+        <p:txBody>
+          <a:bodyPr/>
+          <a:lstStyle/>
+          <a:p>
+            <a:endParaRPr lang="en-GB"/>
+          </a:p>
+        </p:txBody>
       </p:sp>
       <p:sp>
         <p:nvSpPr>
@@ -13653,6 +14209,13 @@
             </a:outerShdw>
           </a:effectLst>
         </p:spPr>
+        <p:txBody>
+          <a:bodyPr/>
+          <a:lstStyle/>
+          <a:p>
+            <a:endParaRPr lang="en-GB"/>
+          </a:p>
+        </p:txBody>
       </p:sp>
       <p:sp>
         <p:nvSpPr>
@@ -13678,6 +14241,13 @@
             <a:prstDash val="solid"/>
           </a:ln>
         </p:spPr>
+        <p:txBody>
+          <a:bodyPr/>
+          <a:lstStyle/>
+          <a:p>
+            <a:endParaRPr lang="en-GB"/>
+          </a:p>
+        </p:txBody>
       </p:sp>
       <p:sp>
         <p:nvSpPr>
@@ -13841,6 +14411,13 @@
             </a:outerShdw>
           </a:effectLst>
         </p:spPr>
+        <p:txBody>
+          <a:bodyPr/>
+          <a:lstStyle/>
+          <a:p>
+            <a:endParaRPr lang="en-GB"/>
+          </a:p>
+        </p:txBody>
       </p:sp>
       <p:sp>
         <p:nvSpPr>
@@ -13866,6 +14443,13 @@
             <a:prstDash val="solid"/>
           </a:ln>
         </p:spPr>
+        <p:txBody>
+          <a:bodyPr/>
+          <a:lstStyle/>
+          <a:p>
+            <a:endParaRPr lang="en-GB"/>
+          </a:p>
+        </p:txBody>
       </p:sp>
       <p:sp>
         <p:nvSpPr>
@@ -14001,45 +14585,36 @@
           </a:p>
         </p:txBody>
       </p:sp>
-      <p:sp>
-        <p:nvSpPr>
-          <p:cNvPr id="24" name="Text 21"/>
-          <p:cNvSpPr/>
-          <p:nvPr/>
-        </p:nvSpPr>
-        <p:spPr>
-          <a:xfrm>
-            <a:off x="365760" y="3639312"/>
-            <a:ext cx="5029200" cy="274320"/>
-          </a:xfrm>
-          <a:prstGeom prst="rect">
-            <a:avLst/>
-          </a:prstGeom>
-          <a:noFill/>
-          <a:ln/>
-        </p:spPr>
-        <p:txBody>
-          <a:bodyPr wrap="square" rtlCol="0" anchor="ctr"/>
-          <a:lstStyle/>
-          <a:p>
-            <a:pPr marL="0" indent="0" algn="ctr">
-              <a:buNone/>
-            </a:pPr>
-            <a:r>
-              <a:rPr lang="en-US" sz="1000" dirty="0">
-                <a:solidFill>
-                  <a:srgbClr val="A0AEC0"/>
-                </a:solidFill>
-                <a:latin typeface="Calibri" pitchFamily="34" charset="0"/>
-                <a:ea typeface="Calibri" pitchFamily="34" charset="-122"/>
-                <a:cs typeface="Calibri" pitchFamily="34" charset="-120"/>
-              </a:rPr>
-              <a:t>Filtered EEG signal (0.5–45 Hz bandpass, MNE)</a:t>
-            </a:r>
-            <a:endParaRPr lang="en-US" sz="1000" dirty="0"/>
-          </a:p>
-        </p:txBody>
-      </p:sp>
+      <p:pic>
+        <p:nvPicPr>
+          <p:cNvPr id="28" name="Picture 27">
+            <a:extLst>
+              <a:ext uri="{FF2B5EF4-FFF2-40B4-BE49-F238E27FC236}">
+                <a16:creationId xmlns:a16="http://schemas.microsoft.com/office/drawing/2014/main" id="{0A2BD483-17D4-C4BC-6666-0541E3F0C85C}"/>
+              </a:ext>
+            </a:extLst>
+          </p:cNvPr>
+          <p:cNvPicPr>
+            <a:picLocks noChangeAspect="1"/>
+          </p:cNvPicPr>
+          <p:nvPr/>
+        </p:nvPicPr>
+        <p:blipFill>
+          <a:blip r:embed="rId4"/>
+          <a:stretch>
+            <a:fillRect/>
+          </a:stretch>
+        </p:blipFill>
+        <p:spPr>
+          <a:xfrm>
+            <a:off x="100911" y="733153"/>
+            <a:ext cx="3873790" cy="1936895"/>
+          </a:xfrm>
+          <a:prstGeom prst="rect">
+            <a:avLst/>
+          </a:prstGeom>
+        </p:spPr>
+      </p:pic>
     </p:spTree>
   </p:cSld>
   <p:clrMapOvr>
@@ -14179,6 +14754,13 @@
             </a:outerShdw>
           </a:effectLst>
         </p:spPr>
+        <p:txBody>
+          <a:bodyPr/>
+          <a:lstStyle/>
+          <a:p>
+            <a:endParaRPr lang="en-GB"/>
+          </a:p>
+        </p:txBody>
       </p:sp>
       <p:sp>
         <p:nvSpPr>
@@ -14646,6 +15228,13 @@
             </a:outerShdw>
           </a:effectLst>
         </p:spPr>
+        <p:txBody>
+          <a:bodyPr/>
+          <a:lstStyle/>
+          <a:p>
+            <a:endParaRPr lang="en-GB"/>
+          </a:p>
+        </p:txBody>
       </p:sp>
       <p:sp>
         <p:nvSpPr>
@@ -14746,6 +15335,13 @@
           </a:solidFill>
           <a:ln/>
         </p:spPr>
+        <p:txBody>
+          <a:bodyPr/>
+          <a:lstStyle/>
+          <a:p>
+            <a:endParaRPr lang="en-GB"/>
+          </a:p>
+        </p:txBody>
       </p:sp>
       <p:sp>
         <p:nvSpPr>
@@ -14771,6 +15367,13 @@
             <a:prstDash val="solid"/>
           </a:ln>
         </p:spPr>
+        <p:txBody>
+          <a:bodyPr/>
+          <a:lstStyle/>
+          <a:p>
+            <a:endParaRPr lang="en-GB"/>
+          </a:p>
+        </p:txBody>
       </p:sp>
       <p:sp>
         <p:nvSpPr>
@@ -14871,6 +15474,13 @@
           </a:solidFill>
           <a:ln/>
         </p:spPr>
+        <p:txBody>
+          <a:bodyPr/>
+          <a:lstStyle/>
+          <a:p>
+            <a:endParaRPr lang="en-GB"/>
+          </a:p>
+        </p:txBody>
       </p:sp>
       <p:sp>
         <p:nvSpPr>
@@ -14896,6 +15506,13 @@
             <a:prstDash val="solid"/>
           </a:ln>
         </p:spPr>
+        <p:txBody>
+          <a:bodyPr/>
+          <a:lstStyle/>
+          <a:p>
+            <a:endParaRPr lang="en-GB"/>
+          </a:p>
+        </p:txBody>
       </p:sp>
       <p:sp>
         <p:nvSpPr>
@@ -14996,6 +15613,13 @@
           </a:solidFill>
           <a:ln/>
         </p:spPr>
+        <p:txBody>
+          <a:bodyPr/>
+          <a:lstStyle/>
+          <a:p>
+            <a:endParaRPr lang="en-GB"/>
+          </a:p>
+        </p:txBody>
       </p:sp>
       <p:sp>
         <p:nvSpPr>
@@ -15021,6 +15645,13 @@
             <a:prstDash val="solid"/>
           </a:ln>
         </p:spPr>
+        <p:txBody>
+          <a:bodyPr/>
+          <a:lstStyle/>
+          <a:p>
+            <a:endParaRPr lang="en-GB"/>
+          </a:p>
+        </p:txBody>
       </p:sp>
       <p:sp>
         <p:nvSpPr>
@@ -15121,6 +15752,13 @@
           </a:solidFill>
           <a:ln/>
         </p:spPr>
+        <p:txBody>
+          <a:bodyPr/>
+          <a:lstStyle/>
+          <a:p>
+            <a:endParaRPr lang="en-GB"/>
+          </a:p>
+        </p:txBody>
       </p:sp>
       <p:sp>
         <p:nvSpPr>
@@ -15146,6 +15784,13 @@
             <a:prstDash val="solid"/>
           </a:ln>
         </p:spPr>
+        <p:txBody>
+          <a:bodyPr/>
+          <a:lstStyle/>
+          <a:p>
+            <a:endParaRPr lang="en-GB"/>
+          </a:p>
+        </p:txBody>
       </p:sp>
       <p:sp>
         <p:nvSpPr>
@@ -15246,6 +15891,13 @@
           </a:solidFill>
           <a:ln/>
         </p:spPr>
+        <p:txBody>
+          <a:bodyPr/>
+          <a:lstStyle/>
+          <a:p>
+            <a:endParaRPr lang="en-GB"/>
+          </a:p>
+        </p:txBody>
       </p:sp>
       <p:sp>
         <p:nvSpPr>
@@ -15271,6 +15923,13 @@
             <a:prstDash val="solid"/>
           </a:ln>
         </p:spPr>
+        <p:txBody>
+          <a:bodyPr/>
+          <a:lstStyle/>
+          <a:p>
+            <a:endParaRPr lang="en-GB"/>
+          </a:p>
+        </p:txBody>
       </p:sp>
       <p:sp>
         <p:nvSpPr>
@@ -15728,6 +16387,13 @@
             </a:outerShdw>
           </a:effectLst>
         </p:spPr>
+        <p:txBody>
+          <a:bodyPr/>
+          <a:lstStyle/>
+          <a:p>
+            <a:endParaRPr lang="en-GB"/>
+          </a:p>
+        </p:txBody>
       </p:sp>
       <p:sp>
         <p:nvSpPr>
@@ -15872,6 +16538,13 @@
             </a:outerShdw>
           </a:effectLst>
         </p:spPr>
+        <p:txBody>
+          <a:bodyPr/>
+          <a:lstStyle/>
+          <a:p>
+            <a:endParaRPr lang="en-GB"/>
+          </a:p>
+        </p:txBody>
       </p:sp>
       <p:sp>
         <p:nvSpPr>
